--- a/dist/초4/과학/기후와생활/초4_과학_기후와생활_01_기후변화와생활_학생용.pptx
+++ b/dist/초4/과학/기후와생활/초4_과학_기후와생활_01_기후변화와생활_학생용.pptx
@@ -123,13 +123,13 @@
   <p:extLst>
     <p:ext uri="{521415D9-36F7-43E2-AB2F-B90AF26B5E84}">
       <p14:sectionLst xmlns:p14="http://schemas.microsoft.com/office/powerpoint/2010/main">
-        <p14:section name="도입" id="{0ec684b7-087e-6ff0-cdee-0b66a637b1f1}">
+        <p14:section name="도입" id="{87165bc1-4b59-9253-9698-a3cb854d0b57}">
           <p14:sldIdLst>
             <p14:sldId id="256"/>
             <p14:sldId id="257"/>
           </p14:sldIdLst>
         </p14:section>
-        <p14:section name="개념" id="{87f399b1-0cac-9624-036f-4b161e0d2da2}">
+        <p14:section name="개념" id="{e3e919df-14e2-5b2c-611a-d454aff85b06}">
           <p14:sldIdLst>
             <p14:sldId id="258"/>
             <p14:sldId id="261"/>
@@ -137,7 +137,7 @@
             <p14:sldId id="267"/>
           </p14:sldIdLst>
         </p14:section>
-        <p14:section name="연습" id="{26586b4c-df2f-84b5-2acf-5eb9445a2bc6}">
+        <p14:section name="연습" id="{e073a21f-fc5f-c0b7-409d-473482b295ec}">
           <p14:sldIdLst>
             <p14:sldId id="259"/>
             <p14:sldId id="260"/>
@@ -148,30 +148,30 @@
             <p14:sldId id="268"/>
           </p14:sldIdLst>
         </p14:section>
-        <p14:section name="개념" id="{8fc26b92-d717-1c80-4f0a-718f37e49a73}">
+        <p14:section name="개념" id="{a6152f63-ad67-f158-c8b8-cb36f0f71d10}">
           <p14:sldIdLst/>
         </p14:section>
-        <p14:section name="연습" id="{6226d46c-aa76-7286-5785-24f0a799ef87}">
+        <p14:section name="연습" id="{1048cb1b-7063-d3d5-78a5-5f497366d15c}">
           <p14:sldIdLst/>
         </p14:section>
-        <p14:section name="개념" id="{18af09b5-7c0b-c03b-0eef-afbda7e123f1}">
+        <p14:section name="개념" id="{e8edc5e2-1efd-a762-630a-fe83ec6afdfb}">
           <p14:sldIdLst/>
         </p14:section>
-        <p14:section name="연습" id="{9229bf80-7467-d855-7770-6fe16bc122e4}">
+        <p14:section name="연습" id="{ae15123f-17fe-b98b-1d59-dbbb8d4b82ca}">
           <p14:sldIdLst/>
         </p14:section>
-        <p14:section name="확인" id="{8422f4d8-c339-5d8f-94bf-23fa4e1f75f5}">
+        <p14:section name="확인" id="{8c206941-6e3a-095a-653f-5c05221dd090}">
           <p14:sldIdLst>
             <p14:sldId id="269"/>
             <p14:sldId id="270"/>
           </p14:sldIdLst>
         </p14:section>
-        <p14:section name="정리" id="{96fc7c45-28f4-c85d-0cfb-b9621d2e9ab0}">
+        <p14:section name="정리" id="{bdaa6517-57d7-5831-20a2-8aa0a17df036}">
           <p14:sldIdLst>
             <p14:sldId id="271"/>
           </p14:sldIdLst>
         </p14:section>
-        <p14:section name="보충" id="{356a2c44-643a-38b2-243e-cf7a66686bff}">
+        <p14:section name="보충" id="{bbeeeca1-e7ed-6cde-6920-4c554a4fafe9}">
           <p14:sldIdLst>
             <p14:sldId id="272"/>
           </p14:sldIdLst>
